--- a/Courses/Computer-Modeling-and-IT/Computer-Modeling-and-IT-6-Class/01-Basic-Units-of-Information/01-Information-and-Units-of-Measurement.pptx
+++ b/Courses/Computer-Modeling-and-IT/Computer-Modeling-and-IT-6-Class/01-Basic-Units-of-Information/01-Information-and-Units-of-Measurement.pptx
@@ -279,7 +279,7 @@
           <a:p>
             <a:fld id="{4E087215-0C8F-4762-A664-737A353EC9A4}" type="datetimeFigureOut">
               <a:rPr lang="bg-BG" smtClean="0"/>
-              <a:t>10.1.2025 г.</a:t>
+              <a:t>25.9.2026 г.</a:t>
             </a:fld>
             <a:endParaRPr lang="bg-BG"/>
           </a:p>
@@ -475,7 +475,7 @@
           <a:p>
             <a:fld id="{72D84649-876A-46C9-8472-14CB09C070D8}" type="datetimeFigureOut">
               <a:rPr lang="en-US" smtClean="0"/>
-              <a:t>1/10/2025</a:t>
+              <a:t>9/25/2026</a:t>
             </a:fld>
             <a:endParaRPr lang="en-US"/>
           </a:p>
@@ -7285,14 +7285,13 @@
               </a:ext>
             </a:extLst>
           </a:blip>
-          <a:stretch>
-            <a:fillRect/>
-          </a:stretch>
+          <a:srcRect/>
+          <a:stretch/>
         </p:blipFill>
         <p:spPr>
           <a:xfrm>
-            <a:off x="525302" y="3159000"/>
-            <a:ext cx="2002460" cy="898099"/>
+            <a:off x="525302" y="3159338"/>
+            <a:ext cx="2002460" cy="897423"/>
           </a:xfrm>
           <a:prstGeom prst="rect">
             <a:avLst/>
